--- a/semicon-west/semicon-west-supply-chain-risk.pptx
+++ b/semicon-west/semicon-west-supply-chain-risk.pptx
@@ -4401,7 +4401,7 @@
                 <a:ea typeface="Calibri" pitchFamily="34" charset="-122"/>
                 <a:cs typeface="Calibri" pitchFamily="34" charset="-120"/>
               </a:rPr>
-              <a:t>Knowledge graphs, graph neural networks</a:t>
+              <a:t>Knowledge graphs, GNNs</a:t>
             </a:r>
             <a:endParaRPr lang="en-US" sz="1100" dirty="0"/>
           </a:p>
@@ -4608,7 +4608,7 @@
                 <a:ea typeface="Calibri" pitchFamily="34" charset="-122"/>
                 <a:cs typeface="Calibri" pitchFamily="34" charset="-120"/>
               </a:rPr>
-              <a:t>NLP &amp; large language models</a:t>
+              <a:t>NLP &amp; LLMs</a:t>
             </a:r>
             <a:endParaRPr lang="en-US" sz="1600" dirty="0"/>
           </a:p>
@@ -4647,7 +4647,7 @@
                 <a:ea typeface="Calibri" pitchFamily="34" charset="-122"/>
                 <a:cs typeface="Calibri" pitchFamily="34" charset="-120"/>
               </a:rPr>
-              <a:t>Classifiers, LLMs, retrieval</a:t>
+              <a:t>Classifiers, language models, retrieval</a:t>
             </a:r>
             <a:endParaRPr lang="en-US" sz="1100" dirty="0"/>
           </a:p>
